--- a/ExamC_ゲーム開発総合体験.pptx
+++ b/ExamC_ゲーム開発総合体験.pptx
@@ -277,7 +277,7 @@
           <a:p>
             <a:fld id="{124BC0BF-F2AC-4482-905E-FD9F608EE5B4}" type="datetimeFigureOut">
               <a:rPr kumimoji="1" lang="ja-JP" altLang="en-US" smtClean="0"/>
-              <a:t>2025/4/12</a:t>
+              <a:t>2025/12/4</a:t>
             </a:fld>
             <a:endParaRPr kumimoji="1" lang="ja-JP" altLang="en-US"/>
           </a:p>
@@ -507,7 +507,7 @@
           <a:p>
             <a:fld id="{124BC0BF-F2AC-4482-905E-FD9F608EE5B4}" type="datetimeFigureOut">
               <a:rPr kumimoji="1" lang="ja-JP" altLang="en-US" smtClean="0"/>
-              <a:t>2025/4/12</a:t>
+              <a:t>2025/12/4</a:t>
             </a:fld>
             <a:endParaRPr kumimoji="1" lang="ja-JP" altLang="en-US"/>
           </a:p>
@@ -747,7 +747,7 @@
           <a:p>
             <a:fld id="{124BC0BF-F2AC-4482-905E-FD9F608EE5B4}" type="datetimeFigureOut">
               <a:rPr kumimoji="1" lang="ja-JP" altLang="en-US" smtClean="0"/>
-              <a:t>2025/4/12</a:t>
+              <a:t>2025/12/4</a:t>
             </a:fld>
             <a:endParaRPr kumimoji="1" lang="ja-JP" altLang="en-US"/>
           </a:p>
@@ -977,7 +977,7 @@
           <a:p>
             <a:fld id="{124BC0BF-F2AC-4482-905E-FD9F608EE5B4}" type="datetimeFigureOut">
               <a:rPr kumimoji="1" lang="ja-JP" altLang="en-US" smtClean="0"/>
-              <a:t>2025/4/12</a:t>
+              <a:t>2025/12/4</a:t>
             </a:fld>
             <a:endParaRPr kumimoji="1" lang="ja-JP" altLang="en-US"/>
           </a:p>
@@ -1252,7 +1252,7 @@
           <a:p>
             <a:fld id="{124BC0BF-F2AC-4482-905E-FD9F608EE5B4}" type="datetimeFigureOut">
               <a:rPr kumimoji="1" lang="ja-JP" altLang="en-US" smtClean="0"/>
-              <a:t>2025/4/12</a:t>
+              <a:t>2025/12/4</a:t>
             </a:fld>
             <a:endParaRPr kumimoji="1" lang="ja-JP" altLang="en-US"/>
           </a:p>
@@ -1581,7 +1581,7 @@
           <a:p>
             <a:fld id="{124BC0BF-F2AC-4482-905E-FD9F608EE5B4}" type="datetimeFigureOut">
               <a:rPr kumimoji="1" lang="ja-JP" altLang="en-US" smtClean="0"/>
-              <a:t>2025/4/12</a:t>
+              <a:t>2025/12/4</a:t>
             </a:fld>
             <a:endParaRPr kumimoji="1" lang="ja-JP" altLang="en-US"/>
           </a:p>
@@ -2057,7 +2057,7 @@
           <a:p>
             <a:fld id="{124BC0BF-F2AC-4482-905E-FD9F608EE5B4}" type="datetimeFigureOut">
               <a:rPr kumimoji="1" lang="ja-JP" altLang="en-US" smtClean="0"/>
-              <a:t>2025/4/12</a:t>
+              <a:t>2025/12/4</a:t>
             </a:fld>
             <a:endParaRPr kumimoji="1" lang="ja-JP" altLang="en-US"/>
           </a:p>
@@ -2198,7 +2198,7 @@
           <a:p>
             <a:fld id="{124BC0BF-F2AC-4482-905E-FD9F608EE5B4}" type="datetimeFigureOut">
               <a:rPr kumimoji="1" lang="ja-JP" altLang="en-US" smtClean="0"/>
-              <a:t>2025/4/12</a:t>
+              <a:t>2025/12/4</a:t>
             </a:fld>
             <a:endParaRPr kumimoji="1" lang="ja-JP" altLang="en-US"/>
           </a:p>
@@ -2311,7 +2311,7 @@
           <a:p>
             <a:fld id="{124BC0BF-F2AC-4482-905E-FD9F608EE5B4}" type="datetimeFigureOut">
               <a:rPr kumimoji="1" lang="ja-JP" altLang="en-US" smtClean="0"/>
-              <a:t>2025/4/12</a:t>
+              <a:t>2025/12/4</a:t>
             </a:fld>
             <a:endParaRPr kumimoji="1" lang="ja-JP" altLang="en-US"/>
           </a:p>
@@ -2654,7 +2654,7 @@
           <a:p>
             <a:fld id="{124BC0BF-F2AC-4482-905E-FD9F608EE5B4}" type="datetimeFigureOut">
               <a:rPr kumimoji="1" lang="ja-JP" altLang="en-US" smtClean="0"/>
-              <a:t>2025/4/12</a:t>
+              <a:t>2025/12/4</a:t>
             </a:fld>
             <a:endParaRPr kumimoji="1" lang="ja-JP" altLang="en-US"/>
           </a:p>
@@ -2942,7 +2942,7 @@
           <a:p>
             <a:fld id="{124BC0BF-F2AC-4482-905E-FD9F608EE5B4}" type="datetimeFigureOut">
               <a:rPr kumimoji="1" lang="ja-JP" altLang="en-US" smtClean="0"/>
-              <a:t>2025/4/12</a:t>
+              <a:t>2025/12/4</a:t>
             </a:fld>
             <a:endParaRPr kumimoji="1" lang="ja-JP" altLang="en-US"/>
           </a:p>
@@ -3215,7 +3215,7 @@
           <a:p>
             <a:fld id="{124BC0BF-F2AC-4482-905E-FD9F608EE5B4}" type="datetimeFigureOut">
               <a:rPr kumimoji="1" lang="ja-JP" altLang="en-US" smtClean="0"/>
-              <a:t>2025/4/12</a:t>
+              <a:t>2025/12/4</a:t>
             </a:fld>
             <a:endParaRPr kumimoji="1" lang="ja-JP" altLang="en-US"/>
           </a:p>
@@ -9130,7 +9130,7 @@
                 <a:ea typeface="+mj-ea"/>
                 <a:cs typeface="+mj-cs"/>
               </a:rPr>
-              <a:t>本日の教員紹介</a:t>
+              <a:t>登壇者紹介</a:t>
             </a:r>
             <a:endParaRPr kumimoji="1" lang="en-US" altLang="ja-JP" sz="4000" b="1" dirty="0">
               <a:effectLst>
